--- a/presentations/11-c-capstone/11-c-capstone-lecture.pptx
+++ b/presentations/11-c-capstone/11-c-capstone-lecture.pptx
@@ -138,7 +138,7 @@
   <p:extLst>
     <p:ext uri="{521415D9-36F7-43E2-AB2F-B90AF26B5E84}">
       <p14:sectionLst xmlns:p14="http://schemas.microsoft.com/office/powerpoint/2010/main">
-        <p14:section name="Opening" id="{37fc10ee-3609-8004-0a4e-25dd8ef8408a}">
+        <p14:section name="Opening" id="{94ce9585-cf4e-b1bf-7c93-ae4155f619c5}">
           <p14:sldIdLst>
             <p14:sldId id="256"/>
             <p14:sldId id="257"/>
@@ -149,7 +149,7 @@
             <p14:sldId id="262"/>
           </p14:sldIdLst>
         </p14:section>
-        <p14:section name="Helpers and reading" id="{306d5ac4-a5cb-e3f4-d44a-136c66bcfd08}">
+        <p14:section name="Helpers and reading" id="{0c2deb0b-8d36-3500-a31f-4097243bdeb2}">
           <p14:sldIdLst>
             <p14:sldId id="263"/>
             <p14:sldId id="264"/>
@@ -157,7 +157,7 @@
             <p14:sldId id="266"/>
           </p14:sldIdLst>
         </p14:section>
-        <p14:section name="Fixed point" id="{f5d1663b-fa3d-1803-f0a3-30f430061303}">
+        <p14:section name="Fixed point" id="{695649e7-c286-311d-82cc-7d9ec19a3f98}">
           <p14:sldIdLst>
             <p14:sldId id="267"/>
             <p14:sldId id="268"/>
@@ -170,7 +170,7 @@
             <p14:sldId id="275"/>
           </p14:sldIdLst>
         </p14:section>
-        <p14:section name="Runtime services" id="{d9feed98-242a-b619-7677-d78f6bde9978}">
+        <p14:section name="Runtime services" id="{9f479e21-907a-d1f6-e616-405fc5503d2a}">
           <p14:sldIdLst>
             <p14:sldId id="276"/>
             <p14:sldId id="277"/>
@@ -179,7 +179,7 @@
             <p14:sldId id="280"/>
           </p14:sldIdLst>
         </p14:section>
-        <p14:section name="Shipping" id="{824a4e05-890b-0460-3ef0-ed97ac451f6c}">
+        <p14:section name="Shipping" id="{c044e478-49e6-670f-5e5c-6867ab635e49}">
           <p14:sldIdLst>
             <p14:sldId id="281"/>
             <p14:sldId id="282"/>
@@ -189,7 +189,7 @@
             <p14:sldId id="286"/>
           </p14:sldIdLst>
         </p14:section>
-        <p14:section name="Closing" id="{09fcc303-e701-eb12-cacc-66a753a5f241}">
+        <p14:section name="Closing" id="{3f3cf9f4-f34d-5c75-0ee8-9a7780a2cfbc}">
           <p14:sldIdLst>
             <p14:sldId id="287"/>
           </p14:sldIdLst>
@@ -9633,7 +9633,7 @@
               <a:buNone/>
             </a:pPr>
             <a:r>
-              <a:rPr lang="en-US" sz="1050" dirty="0">
+              <a:rPr lang="en-US" sz="1250" dirty="0">
                 <a:solidFill>
                   <a:srgbClr val="8FB3A0"/>
                 </a:solidFill>
@@ -9641,16 +9641,16 @@
                 <a:ea typeface="Courier New" pitchFamily="34" charset="-122"/>
                 <a:cs typeface="Courier New" pitchFamily="34" charset="-120"/>
               </a:rPr>
-              <a:t>/* dir_q8 holds direction components scaled by 256 (called Q8 fixed point). */</a:t>
-            </a:r>
-            <a:endParaRPr lang="en-US" sz="1050" dirty="0"/>
+              <a:t>/* dir_q8 holds direction components scaled by 256 (called Q8 fixed</a:t>
+            </a:r>
+            <a:endParaRPr lang="en-US" sz="1250" dirty="0"/>
           </a:p>
           <a:p>
             <a:pPr indent="0" marL="0">
               <a:buNone/>
             </a:pPr>
             <a:r>
-              <a:rPr lang="en-US" sz="1050" dirty="0">
+              <a:rPr lang="en-US" sz="1250" dirty="0">
                 <a:solidFill>
                   <a:srgbClr val="E6EDF2"/>
                 </a:solidFill>
@@ -9658,16 +9658,16 @@
                 <a:ea typeface="Courier New" pitchFamily="34" charset="-122"/>
                 <a:cs typeface="Courier New" pitchFamily="34" charset="-120"/>
               </a:rPr>
-              <a:t>int hx = player_x + (dir_q8[angle][0] * dist) / 256;</a:t>
-            </a:r>
-            <a:endParaRPr lang="en-US" sz="1050" dirty="0"/>
+              <a:t>    point). */</a:t>
+            </a:r>
+            <a:endParaRPr lang="en-US" sz="1250" dirty="0"/>
           </a:p>
           <a:p>
             <a:pPr indent="0" marL="0">
               <a:buNone/>
             </a:pPr>
             <a:r>
-              <a:rPr lang="en-US" sz="1050" dirty="0">
+              <a:rPr lang="en-US" sz="1250" dirty="0">
                 <a:solidFill>
                   <a:srgbClr val="E6EDF2"/>
                 </a:solidFill>
@@ -9675,9 +9675,26 @@
                 <a:ea typeface="Courier New" pitchFamily="34" charset="-122"/>
                 <a:cs typeface="Courier New" pitchFamily="34" charset="-120"/>
               </a:rPr>
+              <a:t>int hx = player_x + (dir_q8[angle][0] * dist) / 256;</a:t>
+            </a:r>
+            <a:endParaRPr lang="en-US" sz="1250" dirty="0"/>
+          </a:p>
+          <a:p>
+            <a:pPr indent="0" marL="0">
+              <a:buNone/>
+            </a:pPr>
+            <a:r>
+              <a:rPr lang="en-US" sz="1250" dirty="0">
+                <a:solidFill>
+                  <a:srgbClr val="E6EDF2"/>
+                </a:solidFill>
+                <a:latin typeface="Courier New" pitchFamily="34" charset="0"/>
+                <a:ea typeface="Courier New" pitchFamily="34" charset="-122"/>
+                <a:cs typeface="Courier New" pitchFamily="34" charset="-120"/>
+              </a:rPr>
               <a:t>int hy = player_y + (dir_q8[angle][1] * dist) / 256;</a:t>
             </a:r>
-            <a:endParaRPr lang="en-US" sz="1050" dirty="0"/>
+            <a:endParaRPr lang="en-US" sz="1250" dirty="0"/>
           </a:p>
         </p:txBody>
       </p:sp>
@@ -12527,7 +12544,7 @@
               <a:buNone/>
             </a:pPr>
             <a:r>
-              <a:rPr lang="en-US" sz="1200" dirty="0">
+              <a:rPr lang="en-US" sz="1250" dirty="0">
                 <a:solidFill>
                   <a:srgbClr val="E6EDF2"/>
                 </a:solidFill>
@@ -12537,14 +12554,14 @@
               </a:rPr>
               <a:t>void beep_c_update(void) {</a:t>
             </a:r>
-            <a:endParaRPr lang="en-US" sz="1200" dirty="0"/>
+            <a:endParaRPr lang="en-US" sz="1250" dirty="0"/>
           </a:p>
           <a:p>
             <a:pPr indent="0" marL="0">
               <a:buNone/>
             </a:pPr>
             <a:r>
-              <a:rPr lang="en-US" sz="1200" dirty="0">
+              <a:rPr lang="en-US" sz="1250" dirty="0">
                 <a:solidFill>
                   <a:srgbClr val="E6EDF2"/>
                 </a:solidFill>
@@ -12554,14 +12571,14 @@
               </a:rPr>
               <a:t>    uint32_t input = prg32_input_read();</a:t>
             </a:r>
-            <a:endParaRPr lang="en-US" sz="1200" dirty="0"/>
+            <a:endParaRPr lang="en-US" sz="1250" dirty="0"/>
           </a:p>
           <a:p>
             <a:pPr indent="0" marL="0">
               <a:buNone/>
             </a:pPr>
             <a:r>
-              <a:rPr lang="en-US" sz="1200" dirty="0">
+              <a:rPr lang="en-US" sz="1250" dirty="0">
                 <a:solidFill>
                   <a:srgbClr val="E6EDF2"/>
                 </a:solidFill>
@@ -12575,7 +12592,7 @@
               <a:buNone/>
             </a:pPr>
             <a:r>
-              <a:rPr lang="en-US" sz="1200" dirty="0">
+              <a:rPr lang="en-US" sz="1250" dirty="0">
                 <a:solidFill>
                   <a:srgbClr val="8FB3A0"/>
                 </a:solidFill>
@@ -12583,16 +12600,16 @@
                 <a:ea typeface="Courier New" pitchFamily="34" charset="-122"/>
                 <a:cs typeface="Courier New" pitchFamily="34" charset="-120"/>
               </a:rPr>
-              <a:t>/* edges, not levels */</a:t>
-            </a:r>
-            <a:endParaRPr lang="en-US" sz="1200" dirty="0"/>
+              <a:t>/* edges, not levels</a:t>
+            </a:r>
+            <a:endParaRPr lang="en-US" sz="1250" dirty="0"/>
           </a:p>
           <a:p>
             <a:pPr indent="0" marL="0">
               <a:buNone/>
             </a:pPr>
             <a:r>
-              <a:rPr lang="en-US" sz="1200" dirty="0">
+              <a:rPr lang="en-US" sz="1250" dirty="0">
                 <a:solidFill>
                   <a:srgbClr val="E6EDF2"/>
                 </a:solidFill>
@@ -12600,16 +12617,16 @@
                 <a:ea typeface="Courier New" pitchFamily="34" charset="-122"/>
                 <a:cs typeface="Courier New" pitchFamily="34" charset="-120"/>
               </a:rPr>
-              <a:t>    previous_input = input;</a:t>
-            </a:r>
-            <a:endParaRPr lang="en-US" sz="1200" dirty="0"/>
+              <a:t>        */</a:t>
+            </a:r>
+            <a:endParaRPr lang="en-US" sz="1250" dirty="0"/>
           </a:p>
           <a:p>
             <a:pPr indent="0" marL="0">
               <a:buNone/>
             </a:pPr>
             <a:r>
-              <a:rPr lang="en-US" sz="1200" dirty="0">
+              <a:rPr lang="en-US" sz="1250" dirty="0">
                 <a:solidFill>
                   <a:srgbClr val="E6EDF2"/>
                 </a:solidFill>
@@ -12617,16 +12634,16 @@
                 <a:ea typeface="Courier New" pitchFamily="34" charset="-122"/>
                 <a:cs typeface="Courier New" pitchFamily="34" charset="-120"/>
               </a:rPr>
-              <a:t> </a:t>
-            </a:r>
-            <a:endParaRPr lang="en-US" sz="1200" dirty="0"/>
+              <a:t>    previous_input = input;</a:t>
+            </a:r>
+            <a:endParaRPr lang="en-US" sz="1250" dirty="0"/>
           </a:p>
           <a:p>
             <a:pPr indent="0" marL="0">
               <a:buNone/>
             </a:pPr>
             <a:r>
-              <a:rPr lang="en-US" sz="1200" dirty="0">
+              <a:rPr lang="en-US" sz="1250" dirty="0">
                 <a:solidFill>
                   <a:srgbClr val="E6EDF2"/>
                 </a:solidFill>
@@ -12634,16 +12651,16 @@
                 <a:ea typeface="Courier New" pitchFamily="34" charset="-122"/>
                 <a:cs typeface="Courier New" pitchFamily="34" charset="-120"/>
               </a:rPr>
-              <a:t>    if (pressed &amp; PRG32_BTN_A) {</a:t>
-            </a:r>
-            <a:endParaRPr lang="en-US" sz="1200" dirty="0"/>
+              <a:t> </a:t>
+            </a:r>
+            <a:endParaRPr lang="en-US" sz="1250" dirty="0"/>
           </a:p>
           <a:p>
             <a:pPr indent="0" marL="0">
               <a:buNone/>
             </a:pPr>
             <a:r>
-              <a:rPr lang="en-US" sz="1200" dirty="0">
+              <a:rPr lang="en-US" sz="1250" dirty="0">
                 <a:solidFill>
                   <a:srgbClr val="E6EDF2"/>
                 </a:solidFill>
@@ -12651,47 +12668,47 @@
                 <a:ea typeface="Courier New" pitchFamily="34" charset="-122"/>
                 <a:cs typeface="Courier New" pitchFamily="34" charset="-120"/>
               </a:rPr>
-              <a:t>        </a:t>
-            </a:r>
+              <a:t>    if (pressed &amp; PRG32_BTN_A) {</a:t>
+            </a:r>
+            <a:endParaRPr lang="en-US" sz="1250" dirty="0"/>
+          </a:p>
+          <a:p>
             <a:pPr indent="0" marL="0">
               <a:buNone/>
             </a:pPr>
             <a:r>
-              <a:rPr lang="en-US" sz="1200" dirty="0">
-                <a:solidFill>
-                  <a:srgbClr val="8FB3A0"/>
+              <a:rPr lang="en-US" sz="1250" dirty="0">
+                <a:solidFill>
+                  <a:srgbClr val="E6EDF2"/>
                 </a:solidFill>
                 <a:latin typeface="Courier New" pitchFamily="34" charset="0"/>
                 <a:ea typeface="Courier New" pitchFamily="34" charset="-122"/>
                 <a:cs typeface="Courier New" pitchFamily="34" charset="-120"/>
               </a:rPr>
-              <a:t>/* channel, instrument, MIDI note, volume, milliseconds */</a:t>
-            </a:r>
-            <a:endParaRPr lang="en-US" sz="1200" dirty="0"/>
-          </a:p>
-          <a:p>
+              <a:t>        </a:t>
+            </a:r>
             <a:pPr indent="0" marL="0">
               <a:buNone/>
             </a:pPr>
             <a:r>
-              <a:rPr lang="en-US" sz="1200" dirty="0">
-                <a:solidFill>
-                  <a:srgbClr val="E6EDF2"/>
+              <a:rPr lang="en-US" sz="1250" dirty="0">
+                <a:solidFill>
+                  <a:srgbClr val="8FB3A0"/>
                 </a:solidFill>
                 <a:latin typeface="Courier New" pitchFamily="34" charset="0"/>
                 <a:ea typeface="Courier New" pitchFamily="34" charset="-122"/>
                 <a:cs typeface="Courier New" pitchFamily="34" charset="-120"/>
               </a:rPr>
-              <a:t>        prg32_audio_note(0, 0, 69, 255, 120);</a:t>
-            </a:r>
-            <a:endParaRPr lang="en-US" sz="1200" dirty="0"/>
+              <a:t>/* channel, instrument, MIDI note, volume, milliseconds */</a:t>
+            </a:r>
+            <a:endParaRPr lang="en-US" sz="1250" dirty="0"/>
           </a:p>
           <a:p>
             <a:pPr indent="0" marL="0">
               <a:buNone/>
             </a:pPr>
             <a:r>
-              <a:rPr lang="en-US" sz="1200" dirty="0">
+              <a:rPr lang="en-US" sz="1250" dirty="0">
                 <a:solidFill>
                   <a:srgbClr val="E6EDF2"/>
                 </a:solidFill>
@@ -12699,16 +12716,16 @@
                 <a:ea typeface="Courier New" pitchFamily="34" charset="-122"/>
                 <a:cs typeface="Courier New" pitchFamily="34" charset="-120"/>
               </a:rPr>
-              <a:t>    }</a:t>
-            </a:r>
-            <a:endParaRPr lang="en-US" sz="1200" dirty="0"/>
+              <a:t>        prg32_audio_note(0, 0, 69, 255, 120);</a:t>
+            </a:r>
+            <a:endParaRPr lang="en-US" sz="1250" dirty="0"/>
           </a:p>
           <a:p>
             <a:pPr indent="0" marL="0">
               <a:buNone/>
             </a:pPr>
             <a:r>
-              <a:rPr lang="en-US" sz="1200" dirty="0">
+              <a:rPr lang="en-US" sz="1250" dirty="0">
                 <a:solidFill>
                   <a:srgbClr val="E6EDF2"/>
                 </a:solidFill>
@@ -12716,9 +12733,26 @@
                 <a:ea typeface="Courier New" pitchFamily="34" charset="-122"/>
                 <a:cs typeface="Courier New" pitchFamily="34" charset="-120"/>
               </a:rPr>
+              <a:t>    }</a:t>
+            </a:r>
+            <a:endParaRPr lang="en-US" sz="1250" dirty="0"/>
+          </a:p>
+          <a:p>
+            <a:pPr indent="0" marL="0">
+              <a:buNone/>
+            </a:pPr>
+            <a:r>
+              <a:rPr lang="en-US" sz="1250" dirty="0">
+                <a:solidFill>
+                  <a:srgbClr val="E6EDF2"/>
+                </a:solidFill>
+                <a:latin typeface="Courier New" pitchFamily="34" charset="0"/>
+                <a:ea typeface="Courier New" pitchFamily="34" charset="-122"/>
+                <a:cs typeface="Courier New" pitchFamily="34" charset="-120"/>
+              </a:rPr>
               <a:t>}</a:t>
             </a:r>
-            <a:endParaRPr lang="en-US" sz="1200" dirty="0"/>
+            <a:endParaRPr lang="en-US" sz="1250" dirty="0"/>
           </a:p>
         </p:txBody>
       </p:sp>
@@ -13227,7 +13261,7 @@
               <a:buNone/>
             </a:pPr>
             <a:r>
-              <a:rPr lang="en-US" sz="1200" dirty="0">
+              <a:rPr lang="en-US" sz="1250" dirty="0">
                 <a:solidFill>
                   <a:srgbClr val="E6EDF2"/>
                 </a:solidFill>
@@ -13237,14 +13271,14 @@
               </a:rPr>
               <a:t>static void spawn_target(void) {</a:t>
             </a:r>
-            <a:endParaRPr lang="en-US" sz="1200" dirty="0"/>
+            <a:endParaRPr lang="en-US" sz="1250" dirty="0"/>
           </a:p>
           <a:p>
             <a:pPr indent="0" marL="0">
               <a:buNone/>
             </a:pPr>
             <a:r>
-              <a:rPr lang="en-US" sz="1200" dirty="0">
+              <a:rPr lang="en-US" sz="1250" dirty="0">
                 <a:solidFill>
                   <a:srgbClr val="E6EDF2"/>
                 </a:solidFill>
@@ -13258,7 +13292,7 @@
               <a:buNone/>
             </a:pPr>
             <a:r>
-              <a:rPr lang="en-US" sz="1200" dirty="0">
+              <a:rPr lang="en-US" sz="1250" dirty="0">
                 <a:solidFill>
                   <a:srgbClr val="8FB3A0"/>
                 </a:solidFill>
@@ -13266,16 +13300,16 @@
                 <a:ea typeface="Courier New" pitchFamily="34" charset="-122"/>
                 <a:cs typeface="Courier New" pitchFamily="34" charset="-120"/>
               </a:rPr>
-              <a:t>/* inclusive range: 0 .. 304 keeps a 16-pixel target on screen */</a:t>
-            </a:r>
-            <a:endParaRPr lang="en-US" sz="1200" dirty="0"/>
+              <a:t>/* inclusive range: 0 .. 304 keeps a 16-pixel target on screen</a:t>
+            </a:r>
+            <a:endParaRPr lang="en-US" sz="1250" dirty="0"/>
           </a:p>
           <a:p>
             <a:pPr indent="0" marL="0">
               <a:buNone/>
             </a:pPr>
             <a:r>
-              <a:rPr lang="en-US" sz="1200" dirty="0">
+              <a:rPr lang="en-US" sz="1250" dirty="0">
                 <a:solidFill>
                   <a:srgbClr val="E6EDF2"/>
                 </a:solidFill>
@@ -13283,16 +13317,16 @@
                 <a:ea typeface="Courier New" pitchFamily="34" charset="-122"/>
                 <a:cs typeface="Courier New" pitchFamily="34" charset="-120"/>
               </a:rPr>
-              <a:t>    target_x = (int)prg32_random_number(0, PRG32_GAME_W - 16);</a:t>
-            </a:r>
-            <a:endParaRPr lang="en-US" sz="1200" dirty="0"/>
+              <a:t>        */</a:t>
+            </a:r>
+            <a:endParaRPr lang="en-US" sz="1250" dirty="0"/>
           </a:p>
           <a:p>
             <a:pPr indent="0" marL="0">
               <a:buNone/>
             </a:pPr>
             <a:r>
-              <a:rPr lang="en-US" sz="1200" dirty="0">
+              <a:rPr lang="en-US" sz="1250" dirty="0">
                 <a:solidFill>
                   <a:srgbClr val="E6EDF2"/>
                 </a:solidFill>
@@ -13300,16 +13334,16 @@
                 <a:ea typeface="Courier New" pitchFamily="34" charset="-122"/>
                 <a:cs typeface="Courier New" pitchFamily="34" charset="-120"/>
               </a:rPr>
-              <a:t>}</a:t>
-            </a:r>
-            <a:endParaRPr lang="en-US" sz="1200" dirty="0"/>
+              <a:t>    target_x = (int)prg32_random_number(0, PRG32_GAME_W - 16);</a:t>
+            </a:r>
+            <a:endParaRPr lang="en-US" sz="1250" dirty="0"/>
           </a:p>
           <a:p>
             <a:pPr indent="0" marL="0">
               <a:buNone/>
             </a:pPr>
             <a:r>
-              <a:rPr lang="en-US" sz="1200" dirty="0">
+              <a:rPr lang="en-US" sz="1250" dirty="0">
                 <a:solidFill>
                   <a:srgbClr val="E6EDF2"/>
                 </a:solidFill>
@@ -13317,16 +13351,16 @@
                 <a:ea typeface="Courier New" pitchFamily="34" charset="-122"/>
                 <a:cs typeface="Courier New" pitchFamily="34" charset="-120"/>
               </a:rPr>
-              <a:t> </a:t>
-            </a:r>
-            <a:endParaRPr lang="en-US" sz="1200" dirty="0"/>
+              <a:t>}</a:t>
+            </a:r>
+            <a:endParaRPr lang="en-US" sz="1250" dirty="0"/>
           </a:p>
           <a:p>
             <a:pPr indent="0" marL="0">
               <a:buNone/>
             </a:pPr>
             <a:r>
-              <a:rPr lang="en-US" sz="1200" dirty="0">
+              <a:rPr lang="en-US" sz="1250" dirty="0">
                 <a:solidFill>
                   <a:srgbClr val="E6EDF2"/>
                 </a:solidFill>
@@ -13334,16 +13368,16 @@
                 <a:ea typeface="Courier New" pitchFamily="34" charset="-122"/>
                 <a:cs typeface="Courier New" pitchFamily="34" charset="-120"/>
               </a:rPr>
-              <a:t>static void round_over(void) {</a:t>
-            </a:r>
-            <a:endParaRPr lang="en-US" sz="1200" dirty="0"/>
+              <a:t> </a:t>
+            </a:r>
+            <a:endParaRPr lang="en-US" sz="1250" dirty="0"/>
           </a:p>
           <a:p>
             <a:pPr indent="0" marL="0">
               <a:buNone/>
             </a:pPr>
             <a:r>
-              <a:rPr lang="en-US" sz="1200" dirty="0">
+              <a:rPr lang="en-US" sz="1250" dirty="0">
                 <a:solidFill>
                   <a:srgbClr val="E6EDF2"/>
                 </a:solidFill>
@@ -13351,47 +13385,47 @@
                 <a:ea typeface="Courier New" pitchFamily="34" charset="-122"/>
                 <a:cs typeface="Courier New" pitchFamily="34" charset="-120"/>
               </a:rPr>
-              <a:t>    </a:t>
-            </a:r>
+              <a:t>static void round_over(void) {</a:t>
+            </a:r>
+            <a:endParaRPr lang="en-US" sz="1250" dirty="0"/>
+          </a:p>
+          <a:p>
             <a:pPr indent="0" marL="0">
               <a:buNone/>
             </a:pPr>
             <a:r>
-              <a:rPr lang="en-US" sz="1200" dirty="0">
-                <a:solidFill>
-                  <a:srgbClr val="8FB3A0"/>
+              <a:rPr lang="en-US" sz="1250" dirty="0">
+                <a:solidFill>
+                  <a:srgbClr val="E6EDF2"/>
                 </a:solidFill>
                 <a:latin typeface="Courier New" pitchFamily="34" charset="0"/>
                 <a:ea typeface="Courier New" pitchFamily="34" charset="-122"/>
                 <a:cs typeface="Courier New" pitchFamily="34" charset="-120"/>
               </a:rPr>
-              <a:t>/* stores the score under the player name saved in Setup;</a:t>
-            </a:r>
-            <a:endParaRPr lang="en-US" sz="1200" dirty="0"/>
-          </a:p>
-          <a:p>
+              <a:t>    </a:t>
+            </a:r>
             <a:pPr indent="0" marL="0">
               <a:buNone/>
             </a:pPr>
             <a:r>
-              <a:rPr lang="en-US" sz="1200" dirty="0">
-                <a:solidFill>
-                  <a:srgbClr val="E6EDF2"/>
+              <a:rPr lang="en-US" sz="1250" dirty="0">
+                <a:solidFill>
+                  <a:srgbClr val="8FB3A0"/>
                 </a:solidFill>
                 <a:latin typeface="Courier New" pitchFamily="34" charset="0"/>
                 <a:ea typeface="Courier New" pitchFamily="34" charset="-122"/>
                 <a:cs typeface="Courier New" pitchFamily="34" charset="-120"/>
               </a:rPr>
-              <a:t>       a configured Cartridge Store receives it on the next sync */</a:t>
-            </a:r>
-            <a:endParaRPr lang="en-US" sz="1200" dirty="0"/>
+              <a:t>/* stores the score under the player name saved in Setup;</a:t>
+            </a:r>
+            <a:endParaRPr lang="en-US" sz="1250" dirty="0"/>
           </a:p>
           <a:p>
             <a:pPr indent="0" marL="0">
               <a:buNone/>
             </a:pPr>
             <a:r>
-              <a:rPr lang="en-US" sz="1200" dirty="0">
+              <a:rPr lang="en-US" sz="1250" dirty="0">
                 <a:solidFill>
                   <a:srgbClr val="E6EDF2"/>
                 </a:solidFill>
@@ -13399,16 +13433,16 @@
                 <a:ea typeface="Courier New" pitchFamily="34" charset="-122"/>
                 <a:cs typeface="Courier New" pitchFamily="34" charset="-120"/>
               </a:rPr>
-              <a:t>    prg32_score_submit_current_player("my-game", score);</a:t>
-            </a:r>
-            <a:endParaRPr lang="en-US" sz="1200" dirty="0"/>
+              <a:t>       a configured Cartridge Store receives it on the next sync */</a:t>
+            </a:r>
+            <a:endParaRPr lang="en-US" sz="1250" dirty="0"/>
           </a:p>
           <a:p>
             <a:pPr indent="0" marL="0">
               <a:buNone/>
             </a:pPr>
             <a:r>
-              <a:rPr lang="en-US" sz="1200" dirty="0">
+              <a:rPr lang="en-US" sz="1250" dirty="0">
                 <a:solidFill>
                   <a:srgbClr val="E6EDF2"/>
                 </a:solidFill>
@@ -13416,16 +13450,16 @@
                 <a:ea typeface="Courier New" pitchFamily="34" charset="-122"/>
                 <a:cs typeface="Courier New" pitchFamily="34" charset="-120"/>
               </a:rPr>
-              <a:t>    prg32_scoreboard_show("my-game", "HIGH SCORES");</a:t>
-            </a:r>
-            <a:endParaRPr lang="en-US" sz="1200" dirty="0"/>
+              <a:t>    prg32_score_submit_current_player("my-game", score);</a:t>
+            </a:r>
+            <a:endParaRPr lang="en-US" sz="1250" dirty="0"/>
           </a:p>
           <a:p>
             <a:pPr indent="0" marL="0">
               <a:buNone/>
             </a:pPr>
             <a:r>
-              <a:rPr lang="en-US" sz="1200" dirty="0">
+              <a:rPr lang="en-US" sz="1250" dirty="0">
                 <a:solidFill>
                   <a:srgbClr val="E6EDF2"/>
                 </a:solidFill>
@@ -13433,9 +13467,26 @@
                 <a:ea typeface="Courier New" pitchFamily="34" charset="-122"/>
                 <a:cs typeface="Courier New" pitchFamily="34" charset="-120"/>
               </a:rPr>
+              <a:t>    prg32_scoreboard_show("my-game", "HIGH SCORES");</a:t>
+            </a:r>
+            <a:endParaRPr lang="en-US" sz="1250" dirty="0"/>
+          </a:p>
+          <a:p>
+            <a:pPr indent="0" marL="0">
+              <a:buNone/>
+            </a:pPr>
+            <a:r>
+              <a:rPr lang="en-US" sz="1250" dirty="0">
+                <a:solidFill>
+                  <a:srgbClr val="E6EDF2"/>
+                </a:solidFill>
+                <a:latin typeface="Courier New" pitchFamily="34" charset="0"/>
+                <a:ea typeface="Courier New" pitchFamily="34" charset="-122"/>
+                <a:cs typeface="Courier New" pitchFamily="34" charset="-120"/>
+              </a:rPr>
               <a:t>}</a:t>
             </a:r>
-            <a:endParaRPr lang="en-US" sz="1200" dirty="0"/>
+            <a:endParaRPr lang="en-US" sz="1250" dirty="0"/>
           </a:p>
         </p:txBody>
       </p:sp>
@@ -16713,7 +16764,7 @@
               <a:buNone/>
             </a:pPr>
             <a:r>
-              <a:rPr lang="en-US" sz="1200" dirty="0">
+              <a:rPr lang="en-US" sz="1250" dirty="0">
                 <a:solidFill>
                   <a:srgbClr val="E6EDF2"/>
                 </a:solidFill>
@@ -16723,14 +16774,14 @@
               </a:rPr>
               <a:t>python3 -m prg32 cartridge build work/mygame/game.c \</a:t>
             </a:r>
-            <a:endParaRPr lang="en-US" sz="1200" dirty="0"/>
+            <a:endParaRPr lang="en-US" sz="1250" dirty="0"/>
           </a:p>
           <a:p>
             <a:pPr indent="0" marL="0">
               <a:buNone/>
             </a:pPr>
             <a:r>
-              <a:rPr lang="en-US" sz="1200" dirty="0">
+              <a:rPr lang="en-US" sz="1250" dirty="0">
                 <a:solidFill>
                   <a:srgbClr val="E6EDF2"/>
                 </a:solidFill>
@@ -16740,14 +16791,14 @@
               </a:rPr>
               <a:t>  --portable --entry-prefix mygame --name mygame \</a:t>
             </a:r>
-            <a:endParaRPr lang="en-US" sz="1200" dirty="0"/>
+            <a:endParaRPr lang="en-US" sz="1250" dirty="0"/>
           </a:p>
           <a:p>
             <a:pPr indent="0" marL="0">
               <a:buNone/>
             </a:pPr>
             <a:r>
-              <a:rPr lang="en-US" sz="1200" dirty="0">
+              <a:rPr lang="en-US" sz="1250" dirty="0">
                 <a:solidFill>
                   <a:srgbClr val="E6EDF2"/>
                 </a:solidFill>
@@ -16757,14 +16808,14 @@
               </a:rPr>
               <a:t>  --out work/mygame/mygame.prg32</a:t>
             </a:r>
-            <a:endParaRPr lang="en-US" sz="1200" dirty="0"/>
+            <a:endParaRPr lang="en-US" sz="1250" dirty="0"/>
           </a:p>
           <a:p>
             <a:pPr indent="0" marL="0">
               <a:buNone/>
             </a:pPr>
             <a:r>
-              <a:rPr lang="en-US" sz="1200" dirty="0">
+              <a:rPr lang="en-US" sz="1250" dirty="0">
                 <a:solidFill>
                   <a:srgbClr val="E6EDF2"/>
                 </a:solidFill>
@@ -16774,14 +16825,14 @@
               </a:rPr>
               <a:t>python3 -m prg32 cartridge summary work/mygame/mygame.prg32</a:t>
             </a:r>
-            <a:endParaRPr lang="en-US" sz="1200" dirty="0"/>
+            <a:endParaRPr lang="en-US" sz="1250" dirty="0"/>
           </a:p>
           <a:p>
             <a:pPr indent="0" marL="0">
               <a:buNone/>
             </a:pPr>
             <a:r>
-              <a:rPr lang="en-US" sz="1200" dirty="0">
+              <a:rPr lang="en-US" sz="1250" dirty="0">
                 <a:solidFill>
                   <a:srgbClr val="E6EDF2"/>
                 </a:solidFill>
@@ -16791,14 +16842,14 @@
               </a:rPr>
               <a:t> </a:t>
             </a:r>
-            <a:endParaRPr lang="en-US" sz="1200" dirty="0"/>
+            <a:endParaRPr lang="en-US" sz="1250" dirty="0"/>
           </a:p>
           <a:p>
             <a:pPr indent="0" marL="0">
               <a:buNone/>
             </a:pPr>
             <a:r>
-              <a:rPr lang="en-US" sz="1200" dirty="0">
+              <a:rPr lang="en-US" sz="1250" dirty="0">
                 <a:solidFill>
                   <a:srgbClr val="E6EDF2"/>
                 </a:solidFill>
@@ -16812,7 +16863,7 @@
               <a:buNone/>
             </a:pPr>
             <a:r>
-              <a:rPr lang="en-US" sz="1200" dirty="0">
+              <a:rPr lang="en-US" sz="1250" dirty="0">
                 <a:solidFill>
                   <a:srgbClr val="8FB3A0"/>
                 </a:solidFill>
@@ -16820,16 +16871,16 @@
                 <a:ea typeface="Courier New" pitchFamily="34" charset="-122"/>
                 <a:cs typeface="Courier New" pitchFamily="34" charset="-120"/>
               </a:rPr>
-              <a:t> # emulator</a:t>
-            </a:r>
-            <a:endParaRPr lang="en-US" sz="1200" dirty="0"/>
+              <a:t> #</a:t>
+            </a:r>
+            <a:endParaRPr lang="en-US" sz="1250" dirty="0"/>
           </a:p>
           <a:p>
             <a:pPr indent="0" marL="0">
               <a:buNone/>
             </a:pPr>
             <a:r>
-              <a:rPr lang="en-US" sz="1200" dirty="0">
+              <a:rPr lang="en-US" sz="1250" dirty="0">
                 <a:solidFill>
                   <a:srgbClr val="E6EDF2"/>
                 </a:solidFill>
@@ -16837,16 +16888,16 @@
                 <a:ea typeface="Courier New" pitchFamily="34" charset="-122"/>
                 <a:cs typeface="Courier New" pitchFamily="34" charset="-120"/>
               </a:rPr>
-              <a:t>python3 -m prg32 esp32c6 upload work/mygame/mygame.prg32 \</a:t>
-            </a:r>
-            <a:endParaRPr lang="en-US" sz="1200" dirty="0"/>
+              <a:t>    emulator</a:t>
+            </a:r>
+            <a:endParaRPr lang="en-US" sz="1250" dirty="0"/>
           </a:p>
           <a:p>
             <a:pPr indent="0" marL="0">
               <a:buNone/>
             </a:pPr>
             <a:r>
-              <a:rPr lang="en-US" sz="1200" dirty="0">
+              <a:rPr lang="en-US" sz="1250" dirty="0">
                 <a:solidFill>
                   <a:srgbClr val="E6EDF2"/>
                 </a:solidFill>
@@ -16854,23 +16905,40 @@
                 <a:ea typeface="Courier New" pitchFamily="34" charset="-122"/>
                 <a:cs typeface="Courier New" pitchFamily="34" charset="-120"/>
               </a:rPr>
-              <a:t>  --url http://192.168.4.1                                 </a:t>
-            </a:r>
+              <a:t>python3 -m prg32 esp32c6 upload work/mygame/mygame.prg32 \</a:t>
+            </a:r>
+            <a:endParaRPr lang="en-US" sz="1250" dirty="0"/>
+          </a:p>
+          <a:p>
             <a:pPr indent="0" marL="0">
               <a:buNone/>
             </a:pPr>
             <a:r>
-              <a:rPr lang="en-US" sz="1200" dirty="0">
-                <a:solidFill>
-                  <a:srgbClr val="8FB3A0"/>
+              <a:rPr lang="en-US" sz="1250" dirty="0">
+                <a:solidFill>
+                  <a:srgbClr val="E6EDF2"/>
                 </a:solidFill>
                 <a:latin typeface="Courier New" pitchFamily="34" charset="0"/>
                 <a:ea typeface="Courier New" pitchFamily="34" charset="-122"/>
                 <a:cs typeface="Courier New" pitchFamily="34" charset="-120"/>
               </a:rPr>
+              <a:t>  --url http://192.168.4.1                                 </a:t>
+            </a:r>
+            <a:pPr indent="0" marL="0">
+              <a:buNone/>
+            </a:pPr>
+            <a:r>
+              <a:rPr lang="en-US" sz="1250" dirty="0">
+                <a:solidFill>
+                  <a:srgbClr val="8FB3A0"/>
+                </a:solidFill>
+                <a:latin typeface="Courier New" pitchFamily="34" charset="0"/>
+                <a:ea typeface="Courier New" pitchFamily="34" charset="-122"/>
+                <a:cs typeface="Courier New" pitchFamily="34" charset="-120"/>
+              </a:rPr>
               <a:t> # board</a:t>
             </a:r>
-            <a:endParaRPr lang="en-US" sz="1200" dirty="0"/>
+            <a:endParaRPr lang="en-US" sz="1250" dirty="0"/>
           </a:p>
         </p:txBody>
       </p:sp>
@@ -21380,7 +21448,7 @@
               <a:buNone/>
             </a:pPr>
             <a:r>
-              <a:rPr lang="en-US" sz="1200" dirty="0">
+              <a:rPr lang="en-US" sz="1250" dirty="0">
                 <a:solidFill>
                   <a:srgbClr val="E6EDF2"/>
                 </a:solidFill>
@@ -21390,14 +21458,14 @@
               </a:rPr>
               <a:t>#include "prg32.h"</a:t>
             </a:r>
-            <a:endParaRPr lang="en-US" sz="1200" dirty="0"/>
+            <a:endParaRPr lang="en-US" sz="1250" dirty="0"/>
           </a:p>
           <a:p>
             <a:pPr indent="0" marL="0">
               <a:buNone/>
             </a:pPr>
             <a:r>
-              <a:rPr lang="en-US" sz="1200" dirty="0">
+              <a:rPr lang="en-US" sz="1250" dirty="0">
                 <a:solidFill>
                   <a:srgbClr val="E6EDF2"/>
                 </a:solidFill>
@@ -21407,14 +21475,14 @@
               </a:rPr>
               <a:t>#include "freertos/FreeRTOS.h"</a:t>
             </a:r>
-            <a:endParaRPr lang="en-US" sz="1200" dirty="0"/>
+            <a:endParaRPr lang="en-US" sz="1250" dirty="0"/>
           </a:p>
           <a:p>
             <a:pPr indent="0" marL="0">
               <a:buNone/>
             </a:pPr>
             <a:r>
-              <a:rPr lang="en-US" sz="1200" dirty="0">
+              <a:rPr lang="en-US" sz="1250" dirty="0">
                 <a:solidFill>
                   <a:srgbClr val="E6EDF2"/>
                 </a:solidFill>
@@ -21424,14 +21492,14 @@
               </a:rPr>
               <a:t>#include "freertos/task.h"</a:t>
             </a:r>
-            <a:endParaRPr lang="en-US" sz="1200" dirty="0"/>
+            <a:endParaRPr lang="en-US" sz="1250" dirty="0"/>
           </a:p>
           <a:p>
             <a:pPr indent="0" marL="0">
               <a:buNone/>
             </a:pPr>
             <a:r>
-              <a:rPr lang="en-US" sz="1200" dirty="0">
+              <a:rPr lang="en-US" sz="1250" dirty="0">
                 <a:solidFill>
                   <a:srgbClr val="E6EDF2"/>
                 </a:solidFill>
@@ -21441,14 +21509,14 @@
               </a:rPr>
               <a:t> </a:t>
             </a:r>
-            <a:endParaRPr lang="en-US" sz="1200" dirty="0"/>
+            <a:endParaRPr lang="en-US" sz="1250" dirty="0"/>
           </a:p>
           <a:p>
             <a:pPr indent="0" marL="0">
               <a:buNone/>
             </a:pPr>
             <a:r>
-              <a:rPr lang="en-US" sz="1200" dirty="0">
+              <a:rPr lang="en-US" sz="1250" dirty="0">
                 <a:solidFill>
                   <a:srgbClr val="E6EDF2"/>
                 </a:solidFill>
@@ -21458,14 +21526,14 @@
               </a:rPr>
               <a:t>void pong_c_init(void);</a:t>
             </a:r>
-            <a:endParaRPr lang="en-US" sz="1200" dirty="0"/>
+            <a:endParaRPr lang="en-US" sz="1250" dirty="0"/>
           </a:p>
           <a:p>
             <a:pPr indent="0" marL="0">
               <a:buNone/>
             </a:pPr>
             <a:r>
-              <a:rPr lang="en-US" sz="1200" dirty="0">
+              <a:rPr lang="en-US" sz="1250" dirty="0">
                 <a:solidFill>
                   <a:srgbClr val="E6EDF2"/>
                 </a:solidFill>
@@ -21475,14 +21543,14 @@
               </a:rPr>
               <a:t>void pong_c_update(void);</a:t>
             </a:r>
-            <a:endParaRPr lang="en-US" sz="1200" dirty="0"/>
+            <a:endParaRPr lang="en-US" sz="1250" dirty="0"/>
           </a:p>
           <a:p>
             <a:pPr indent="0" marL="0">
               <a:buNone/>
             </a:pPr>
             <a:r>
-              <a:rPr lang="en-US" sz="1200" dirty="0">
+              <a:rPr lang="en-US" sz="1250" dirty="0">
                 <a:solidFill>
                   <a:srgbClr val="E6EDF2"/>
                 </a:solidFill>
@@ -21492,14 +21560,14 @@
               </a:rPr>
               <a:t>void pong_c_draw(void);</a:t>
             </a:r>
-            <a:endParaRPr lang="en-US" sz="1200" dirty="0"/>
+            <a:endParaRPr lang="en-US" sz="1250" dirty="0"/>
           </a:p>
           <a:p>
             <a:pPr indent="0" marL="0">
               <a:buNone/>
             </a:pPr>
             <a:r>
-              <a:rPr lang="en-US" sz="1200" dirty="0">
+              <a:rPr lang="en-US" sz="1250" dirty="0">
                 <a:solidFill>
                   <a:srgbClr val="E6EDF2"/>
                 </a:solidFill>
@@ -21509,14 +21577,14 @@
               </a:rPr>
               <a:t> </a:t>
             </a:r>
-            <a:endParaRPr lang="en-US" sz="1200" dirty="0"/>
+            <a:endParaRPr lang="en-US" sz="1250" dirty="0"/>
           </a:p>
           <a:p>
             <a:pPr indent="0" marL="0">
               <a:buNone/>
             </a:pPr>
             <a:r>
-              <a:rPr lang="en-US" sz="1200" dirty="0">
+              <a:rPr lang="en-US" sz="1250" dirty="0">
                 <a:solidFill>
                   <a:srgbClr val="E6EDF2"/>
                 </a:solidFill>
@@ -21526,14 +21594,14 @@
               </a:rPr>
               <a:t>void app_main(void) {</a:t>
             </a:r>
-            <a:endParaRPr lang="en-US" sz="1200" dirty="0"/>
+            <a:endParaRPr lang="en-US" sz="1250" dirty="0"/>
           </a:p>
           <a:p>
             <a:pPr indent="0" marL="0">
               <a:buNone/>
             </a:pPr>
             <a:r>
-              <a:rPr lang="en-US" sz="1200" dirty="0">
+              <a:rPr lang="en-US" sz="1250" dirty="0">
                 <a:solidFill>
                   <a:srgbClr val="E6EDF2"/>
                 </a:solidFill>
@@ -21543,14 +21611,14 @@
               </a:rPr>
               <a:t>    prg32_init();</a:t>
             </a:r>
-            <a:endParaRPr lang="en-US" sz="1200" dirty="0"/>
+            <a:endParaRPr lang="en-US" sz="1250" dirty="0"/>
           </a:p>
           <a:p>
             <a:pPr indent="0" marL="0">
               <a:buNone/>
             </a:pPr>
             <a:r>
-              <a:rPr lang="en-US" sz="1200" dirty="0">
+              <a:rPr lang="en-US" sz="1250" dirty="0">
                 <a:solidFill>
                   <a:srgbClr val="E6EDF2"/>
                 </a:solidFill>
@@ -21560,14 +21628,14 @@
               </a:rPr>
               <a:t>    pong_c_init();</a:t>
             </a:r>
-            <a:endParaRPr lang="en-US" sz="1200" dirty="0"/>
+            <a:endParaRPr lang="en-US" sz="1250" dirty="0"/>
           </a:p>
           <a:p>
             <a:pPr indent="0" marL="0">
               <a:buNone/>
             </a:pPr>
             <a:r>
-              <a:rPr lang="en-US" sz="1200" dirty="0">
+              <a:rPr lang="en-US" sz="1250" dirty="0">
                 <a:solidFill>
                   <a:srgbClr val="E6EDF2"/>
                 </a:solidFill>
@@ -21577,14 +21645,14 @@
               </a:rPr>
               <a:t>    while (1) {</a:t>
             </a:r>
-            <a:endParaRPr lang="en-US" sz="1200" dirty="0"/>
+            <a:endParaRPr lang="en-US" sz="1250" dirty="0"/>
           </a:p>
           <a:p>
             <a:pPr indent="0" marL="0">
               <a:buNone/>
             </a:pPr>
             <a:r>
-              <a:rPr lang="en-US" sz="1200" dirty="0">
+              <a:rPr lang="en-US" sz="1250" dirty="0">
                 <a:solidFill>
                   <a:srgbClr val="E6EDF2"/>
                 </a:solidFill>
@@ -21594,14 +21662,14 @@
               </a:rPr>
               <a:t>        pong_c_update();</a:t>
             </a:r>
-            <a:endParaRPr lang="en-US" sz="1200" dirty="0"/>
+            <a:endParaRPr lang="en-US" sz="1250" dirty="0"/>
           </a:p>
           <a:p>
             <a:pPr indent="0" marL="0">
               <a:buNone/>
             </a:pPr>
             <a:r>
-              <a:rPr lang="en-US" sz="1200" dirty="0">
+              <a:rPr lang="en-US" sz="1250" dirty="0">
                 <a:solidFill>
                   <a:srgbClr val="E6EDF2"/>
                 </a:solidFill>
@@ -21611,14 +21679,14 @@
               </a:rPr>
               <a:t>        pong_c_draw();</a:t>
             </a:r>
-            <a:endParaRPr lang="en-US" sz="1200" dirty="0"/>
+            <a:endParaRPr lang="en-US" sz="1250" dirty="0"/>
           </a:p>
           <a:p>
             <a:pPr indent="0" marL="0">
               <a:buNone/>
             </a:pPr>
             <a:r>
-              <a:rPr lang="en-US" sz="1200" dirty="0">
+              <a:rPr lang="en-US" sz="1250" dirty="0">
                 <a:solidFill>
                   <a:srgbClr val="E6EDF2"/>
                 </a:solidFill>
@@ -21632,7 +21700,7 @@
               <a:buNone/>
             </a:pPr>
             <a:r>
-              <a:rPr lang="en-US" sz="1200" dirty="0">
+              <a:rPr lang="en-US" sz="1250" dirty="0">
                 <a:solidFill>
                   <a:srgbClr val="8FB3A0"/>
                 </a:solidFill>
@@ -21640,16 +21708,16 @@
                 <a:ea typeface="Courier New" pitchFamily="34" charset="-122"/>
                 <a:cs typeface="Courier New" pitchFamily="34" charset="-120"/>
               </a:rPr>
-              <a:t>/* show the finished frame */</a:t>
-            </a:r>
-            <a:endParaRPr lang="en-US" sz="1200" dirty="0"/>
+              <a:t>/* show the finished frame</a:t>
+            </a:r>
+            <a:endParaRPr lang="en-US" sz="1250" dirty="0"/>
           </a:p>
           <a:p>
             <a:pPr indent="0" marL="0">
               <a:buNone/>
             </a:pPr>
             <a:r>
-              <a:rPr lang="en-US" sz="1200" dirty="0">
+              <a:rPr lang="en-US" sz="1250" dirty="0">
                 <a:solidFill>
                   <a:srgbClr val="E6EDF2"/>
                 </a:solidFill>
@@ -21657,47 +21725,47 @@
                 <a:ea typeface="Courier New" pitchFamily="34" charset="-122"/>
                 <a:cs typeface="Courier New" pitchFamily="34" charset="-120"/>
               </a:rPr>
-              <a:t>        vTaskDelay(pdMS_TO_TICKS(33));   </a:t>
-            </a:r>
+              <a:t>            */</a:t>
+            </a:r>
+            <a:endParaRPr lang="en-US" sz="1250" dirty="0"/>
+          </a:p>
+          <a:p>
             <a:pPr indent="0" marL="0">
               <a:buNone/>
             </a:pPr>
             <a:r>
-              <a:rPr lang="en-US" sz="1200" dirty="0">
-                <a:solidFill>
-                  <a:srgbClr val="8FB3A0"/>
+              <a:rPr lang="en-US" sz="1250" dirty="0">
+                <a:solidFill>
+                  <a:srgbClr val="E6EDF2"/>
                 </a:solidFill>
                 <a:latin typeface="Courier New" pitchFamily="34" charset="0"/>
                 <a:ea typeface="Courier New" pitchFamily="34" charset="-122"/>
                 <a:cs typeface="Courier New" pitchFamily="34" charset="-120"/>
               </a:rPr>
-              <a:t>/* ~30 frames per second */</a:t>
-            </a:r>
-            <a:endParaRPr lang="en-US" sz="1200" dirty="0"/>
-          </a:p>
-          <a:p>
+              <a:t>        vTaskDelay(pdMS_TO_TICKS(33));   </a:t>
+            </a:r>
             <a:pPr indent="0" marL="0">
               <a:buNone/>
             </a:pPr>
             <a:r>
-              <a:rPr lang="en-US" sz="1200" dirty="0">
-                <a:solidFill>
-                  <a:srgbClr val="E6EDF2"/>
+              <a:rPr lang="en-US" sz="1250" dirty="0">
+                <a:solidFill>
+                  <a:srgbClr val="8FB3A0"/>
                 </a:solidFill>
                 <a:latin typeface="Courier New" pitchFamily="34" charset="0"/>
                 <a:ea typeface="Courier New" pitchFamily="34" charset="-122"/>
                 <a:cs typeface="Courier New" pitchFamily="34" charset="-120"/>
               </a:rPr>
-              <a:t>    }</a:t>
-            </a:r>
-            <a:endParaRPr lang="en-US" sz="1200" dirty="0"/>
+              <a:t>/* ~30 frames per second */</a:t>
+            </a:r>
+            <a:endParaRPr lang="en-US" sz="1250" dirty="0"/>
           </a:p>
           <a:p>
             <a:pPr indent="0" marL="0">
               <a:buNone/>
             </a:pPr>
             <a:r>
-              <a:rPr lang="en-US" sz="1200" dirty="0">
+              <a:rPr lang="en-US" sz="1250" dirty="0">
                 <a:solidFill>
                   <a:srgbClr val="E6EDF2"/>
                 </a:solidFill>
@@ -21705,9 +21773,26 @@
                 <a:ea typeface="Courier New" pitchFamily="34" charset="-122"/>
                 <a:cs typeface="Courier New" pitchFamily="34" charset="-120"/>
               </a:rPr>
+              <a:t>    }</a:t>
+            </a:r>
+            <a:endParaRPr lang="en-US" sz="1250" dirty="0"/>
+          </a:p>
+          <a:p>
+            <a:pPr indent="0" marL="0">
+              <a:buNone/>
+            </a:pPr>
+            <a:r>
+              <a:rPr lang="en-US" sz="1250" dirty="0">
+                <a:solidFill>
+                  <a:srgbClr val="E6EDF2"/>
+                </a:solidFill>
+                <a:latin typeface="Courier New" pitchFamily="34" charset="0"/>
+                <a:ea typeface="Courier New" pitchFamily="34" charset="-122"/>
+                <a:cs typeface="Courier New" pitchFamily="34" charset="-120"/>
+              </a:rPr>
               <a:t>}</a:t>
             </a:r>
-            <a:endParaRPr lang="en-US" sz="1200" dirty="0"/>
+            <a:endParaRPr lang="en-US" sz="1250" dirty="0"/>
           </a:p>
         </p:txBody>
       </p:sp>
